--- a/支持库/后端/办公文档支持库/演示文稿/夹具/最小中文演示.pptx
+++ b/支持库/后端/办公文档支持库/演示文稿/夹具/最小中文演示.pptx
@@ -7,7 +7,7 @@
   <p:sldIdLst>
     <p:sldId id="256" r:id="rId7"/>
   </p:sldIdLst>
-  <p:sldSz cx="9144000" cy="6858000" type="screen4x3"/>
+  <p:sldSz cx="12191695" cy="6858000" type="screen4x3"/>
   <p:notesSz cx="6858000" cy="9144000"/>
   <p:defaultTextStyle>
     <a:defPPr>
@@ -3090,30 +3090,40 @@
       <p:grpSpPr/>
       <p:sp>
         <p:nvSpPr>
-          <p:cNvPr id="2" name="TextBox 1"/>
-          <p:cNvSpPr txBox="1"/>
-          <p:nvPr/>
-        </p:nvSpPr>
-        <p:spPr>
-          <a:xfrm>
-            <a:off x="914400" y="914400"/>
-            <a:ext cx="1828800" cy="914400"/>
-          </a:xfrm>
-          <a:prstGeom prst="rect">
-            <a:avLst/>
-          </a:prstGeom>
-          <a:noFill/>
-        </p:spPr>
-        <p:txBody>
-          <a:bodyPr wrap="none">
-            <a:spAutoFit/>
-          </a:bodyPr>
-          <a:lstStyle/>
-          <a:p>
-            <a:r>
-              <a:t>甲</a:t>
-            </a:r>
-          </a:p>
+          <p:cNvPr id="2" name="Title 1"/>
+          <p:cNvSpPr>
+            <a:spLocks noGrp="1"/>
+          </p:cNvSpPr>
+          <p:nvPr>
+            <p:ph type="title"/>
+          </p:nvPr>
+        </p:nvSpPr>
+        <p:spPr/>
+        <p:txBody>
+          <a:bodyPr/>
+          <a:lstStyle/>
+          <a:p>
+            <a:r>
+              <a:t>示例文本</a:t>
+            </a:r>
+          </a:p>
+        </p:txBody>
+      </p:sp>
+      <p:sp>
+        <p:nvSpPr>
+          <p:cNvPr id="3" name="Content Placeholder 2"/>
+          <p:cNvSpPr>
+            <a:spLocks noGrp="1"/>
+          </p:cNvSpPr>
+          <p:nvPr>
+            <p:ph idx="1"/>
+          </p:nvPr>
+        </p:nvSpPr>
+        <p:spPr/>
+        <p:txBody>
+          <a:bodyPr/>
+          <a:lstStyle/>
+          <a:p/>
         </p:txBody>
       </p:sp>
     </p:spTree>
